--- a/FinsightAI.pptx
+++ b/FinsightAI.pptx
@@ -3879,7 +3879,7 @@
           <a:p>
             <a:fld id="{812003DF-B299-4423-B4E8-0FB7E74AF400}" type="datetimeFigureOut">
               <a:rPr lang="en-IN" smtClean="0"/>
-              <a:t>02-07-2025</a:t>
+              <a:t>04-11-2025</a:t>
             </a:fld>
             <a:endParaRPr lang="en-IN"/>
           </a:p>
@@ -4079,7 +4079,7 @@
           <a:p>
             <a:fld id="{812003DF-B299-4423-B4E8-0FB7E74AF400}" type="datetimeFigureOut">
               <a:rPr lang="en-IN" smtClean="0"/>
-              <a:t>02-07-2025</a:t>
+              <a:t>04-11-2025</a:t>
             </a:fld>
             <a:endParaRPr lang="en-IN"/>
           </a:p>
@@ -4289,7 +4289,7 @@
           <a:p>
             <a:fld id="{812003DF-B299-4423-B4E8-0FB7E74AF400}" type="datetimeFigureOut">
               <a:rPr lang="en-IN" smtClean="0"/>
-              <a:t>02-07-2025</a:t>
+              <a:t>04-11-2025</a:t>
             </a:fld>
             <a:endParaRPr lang="en-IN"/>
           </a:p>
@@ -4489,7 +4489,7 @@
           <a:p>
             <a:fld id="{812003DF-B299-4423-B4E8-0FB7E74AF400}" type="datetimeFigureOut">
               <a:rPr lang="en-IN" smtClean="0"/>
-              <a:t>02-07-2025</a:t>
+              <a:t>04-11-2025</a:t>
             </a:fld>
             <a:endParaRPr lang="en-IN"/>
           </a:p>
@@ -4765,7 +4765,7 @@
           <a:p>
             <a:fld id="{812003DF-B299-4423-B4E8-0FB7E74AF400}" type="datetimeFigureOut">
               <a:rPr lang="en-IN" smtClean="0"/>
-              <a:t>02-07-2025</a:t>
+              <a:t>04-11-2025</a:t>
             </a:fld>
             <a:endParaRPr lang="en-IN"/>
           </a:p>
@@ -5033,7 +5033,7 @@
           <a:p>
             <a:fld id="{812003DF-B299-4423-B4E8-0FB7E74AF400}" type="datetimeFigureOut">
               <a:rPr lang="en-IN" smtClean="0"/>
-              <a:t>02-07-2025</a:t>
+              <a:t>04-11-2025</a:t>
             </a:fld>
             <a:endParaRPr lang="en-IN"/>
           </a:p>
@@ -5448,7 +5448,7 @@
           <a:p>
             <a:fld id="{812003DF-B299-4423-B4E8-0FB7E74AF400}" type="datetimeFigureOut">
               <a:rPr lang="en-IN" smtClean="0"/>
-              <a:t>02-07-2025</a:t>
+              <a:t>04-11-2025</a:t>
             </a:fld>
             <a:endParaRPr lang="en-IN"/>
           </a:p>
@@ -5590,7 +5590,7 @@
           <a:p>
             <a:fld id="{812003DF-B299-4423-B4E8-0FB7E74AF400}" type="datetimeFigureOut">
               <a:rPr lang="en-IN" smtClean="0"/>
-              <a:t>02-07-2025</a:t>
+              <a:t>04-11-2025</a:t>
             </a:fld>
             <a:endParaRPr lang="en-IN"/>
           </a:p>
@@ -5703,7 +5703,7 @@
           <a:p>
             <a:fld id="{812003DF-B299-4423-B4E8-0FB7E74AF400}" type="datetimeFigureOut">
               <a:rPr lang="en-IN" smtClean="0"/>
-              <a:t>02-07-2025</a:t>
+              <a:t>04-11-2025</a:t>
             </a:fld>
             <a:endParaRPr lang="en-IN"/>
           </a:p>
@@ -6016,7 +6016,7 @@
           <a:p>
             <a:fld id="{812003DF-B299-4423-B4E8-0FB7E74AF400}" type="datetimeFigureOut">
               <a:rPr lang="en-IN" smtClean="0"/>
-              <a:t>02-07-2025</a:t>
+              <a:t>04-11-2025</a:t>
             </a:fld>
             <a:endParaRPr lang="en-IN"/>
           </a:p>
@@ -6305,7 +6305,7 @@
           <a:p>
             <a:fld id="{812003DF-B299-4423-B4E8-0FB7E74AF400}" type="datetimeFigureOut">
               <a:rPr lang="en-IN" smtClean="0"/>
-              <a:t>02-07-2025</a:t>
+              <a:t>04-11-2025</a:t>
             </a:fld>
             <a:endParaRPr lang="en-IN"/>
           </a:p>
@@ -6548,7 +6548,7 @@
           <a:p>
             <a:fld id="{812003DF-B299-4423-B4E8-0FB7E74AF400}" type="datetimeFigureOut">
               <a:rPr lang="en-IN" smtClean="0"/>
-              <a:t>02-07-2025</a:t>
+              <a:t>04-11-2025</a:t>
             </a:fld>
             <a:endParaRPr lang="en-IN"/>
           </a:p>
@@ -6989,14 +6989,44 @@
           <a:lstStyle/>
           <a:p>
             <a:r>
-              <a:rPr lang="en-IN" sz="6600" b="1" dirty="0">
+              <a:rPr lang="en-IN" sz="5400" b="1" dirty="0" err="1">
                 <a:solidFill>
                   <a:srgbClr val="6679D8"/>
                 </a:solidFill>
                 <a:latin typeface="Times New Roman" panose="02020603050405020304" pitchFamily="18" charset="0"/>
                 <a:cs typeface="Times New Roman" panose="02020603050405020304" pitchFamily="18" charset="0"/>
               </a:rPr>
-              <a:t>FinsightAI</a:t>
+              <a:t>Retrival</a:t>
+            </a:r>
+            <a:r>
+              <a:rPr lang="en-IN" sz="5400" b="1" dirty="0">
+                <a:solidFill>
+                  <a:srgbClr val="6679D8"/>
+                </a:solidFill>
+                <a:latin typeface="Times New Roman" panose="02020603050405020304" pitchFamily="18" charset="0"/>
+                <a:cs typeface="Times New Roman" panose="02020603050405020304" pitchFamily="18" charset="0"/>
+              </a:rPr>
+              <a:t> </a:t>
+            </a:r>
+            <a:r>
+              <a:rPr lang="en-IN" sz="5400" b="1" dirty="0" err="1">
+                <a:solidFill>
+                  <a:srgbClr val="6679D8"/>
+                </a:solidFill>
+                <a:latin typeface="Times New Roman" panose="02020603050405020304" pitchFamily="18" charset="0"/>
+                <a:cs typeface="Times New Roman" panose="02020603050405020304" pitchFamily="18" charset="0"/>
+              </a:rPr>
+              <a:t>Augumented</a:t>
+            </a:r>
+            <a:r>
+              <a:rPr lang="en-IN" sz="5400" b="1" dirty="0">
+                <a:solidFill>
+                  <a:srgbClr val="6679D8"/>
+                </a:solidFill>
+                <a:latin typeface="Times New Roman" panose="02020603050405020304" pitchFamily="18" charset="0"/>
+                <a:cs typeface="Times New Roman" panose="02020603050405020304" pitchFamily="18" charset="0"/>
+              </a:rPr>
+              <a:t> generation chatbot</a:t>
             </a:r>
             <a:br>
               <a:rPr lang="en-IN" dirty="0">
@@ -7057,34 +7087,27 @@
           <a:lstStyle/>
           <a:p>
             <a:r>
-              <a:rPr lang="en-IN" b="1">
+              <a:rPr lang="en-IN" b="1" dirty="0">
                 <a:solidFill>
                   <a:srgbClr val="002060"/>
                 </a:solidFill>
                 <a:latin typeface="Times New Roman" panose="02020603050405020304" pitchFamily="18" charset="0"/>
                 <a:cs typeface="Times New Roman" panose="02020603050405020304" pitchFamily="18" charset="0"/>
               </a:rPr>
-              <a:t>Created By:</a:t>
+              <a:t>22mis1086</a:t>
             </a:r>
           </a:p>
           <a:p>
             <a:r>
-              <a:rPr lang="en-IN" b="1">
+              <a:rPr lang="en-IN" b="1" dirty="0">
                 <a:solidFill>
                   <a:srgbClr val="002060"/>
                 </a:solidFill>
                 <a:latin typeface="Times New Roman" panose="02020603050405020304" pitchFamily="18" charset="0"/>
                 <a:cs typeface="Times New Roman" panose="02020603050405020304" pitchFamily="18" charset="0"/>
               </a:rPr>
-              <a:t>Sakthi Kalyani K</a:t>
+              <a:t>Valliammai k</a:t>
             </a:r>
-            <a:endParaRPr lang="en-IN" b="1" dirty="0">
-              <a:solidFill>
-                <a:srgbClr val="002060"/>
-              </a:solidFill>
-              <a:latin typeface="Times New Roman" panose="02020603050405020304" pitchFamily="18" charset="0"/>
-              <a:cs typeface="Times New Roman" panose="02020603050405020304" pitchFamily="18" charset="0"/>
-            </a:endParaRPr>
           </a:p>
         </p:txBody>
       </p:sp>
